--- a/(4.22) 보스 스킬 애니메이션.pptx
+++ b/(4.22) 보스 스킬 애니메이션.pptx
@@ -119,6 +119,11 @@
       </a:defRPr>
     </a:lvl9pPr>
   </p:defaultTextStyle>
+  <p:extLst>
+    <p:ext uri="{EFAFB233-063F-42B5-8137-9DF3F51BA10A}">
+      <p15:sldGuideLst xmlns:p15="http://schemas.microsoft.com/office/powerpoint/2012/main"/>
+    </p:ext>
+  </p:extLst>
 </p:presentation>
 </file>
 
@@ -253,7 +258,7 @@
           <a:p>
             <a:fld id="{0B88EAB9-2298-483C-BF85-65AE06BD6D9F}" type="datetimeFigureOut">
               <a:rPr lang="ko-KR" altLang="en-US" smtClean="0"/>
-              <a:t>2026-04-22</a:t>
+              <a:t>2026-04-23</a:t>
             </a:fld>
             <a:endParaRPr lang="ko-KR" altLang="en-US"/>
           </a:p>
@@ -423,7 +428,7 @@
           <a:p>
             <a:fld id="{0B88EAB9-2298-483C-BF85-65AE06BD6D9F}" type="datetimeFigureOut">
               <a:rPr lang="ko-KR" altLang="en-US" smtClean="0"/>
-              <a:t>2026-04-22</a:t>
+              <a:t>2026-04-23</a:t>
             </a:fld>
             <a:endParaRPr lang="ko-KR" altLang="en-US"/>
           </a:p>
@@ -603,7 +608,7 @@
           <a:p>
             <a:fld id="{0B88EAB9-2298-483C-BF85-65AE06BD6D9F}" type="datetimeFigureOut">
               <a:rPr lang="ko-KR" altLang="en-US" smtClean="0"/>
-              <a:t>2026-04-22</a:t>
+              <a:t>2026-04-23</a:t>
             </a:fld>
             <a:endParaRPr lang="ko-KR" altLang="en-US"/>
           </a:p>
@@ -773,7 +778,7 @@
           <a:p>
             <a:fld id="{0B88EAB9-2298-483C-BF85-65AE06BD6D9F}" type="datetimeFigureOut">
               <a:rPr lang="ko-KR" altLang="en-US" smtClean="0"/>
-              <a:t>2026-04-22</a:t>
+              <a:t>2026-04-23</a:t>
             </a:fld>
             <a:endParaRPr lang="ko-KR" altLang="en-US"/>
           </a:p>
@@ -1019,7 +1024,7 @@
           <a:p>
             <a:fld id="{0B88EAB9-2298-483C-BF85-65AE06BD6D9F}" type="datetimeFigureOut">
               <a:rPr lang="ko-KR" altLang="en-US" smtClean="0"/>
-              <a:t>2026-04-22</a:t>
+              <a:t>2026-04-23</a:t>
             </a:fld>
             <a:endParaRPr lang="ko-KR" altLang="en-US"/>
           </a:p>
@@ -1251,7 +1256,7 @@
           <a:p>
             <a:fld id="{0B88EAB9-2298-483C-BF85-65AE06BD6D9F}" type="datetimeFigureOut">
               <a:rPr lang="ko-KR" altLang="en-US" smtClean="0"/>
-              <a:t>2026-04-22</a:t>
+              <a:t>2026-04-23</a:t>
             </a:fld>
             <a:endParaRPr lang="ko-KR" altLang="en-US"/>
           </a:p>
@@ -1618,7 +1623,7 @@
           <a:p>
             <a:fld id="{0B88EAB9-2298-483C-BF85-65AE06BD6D9F}" type="datetimeFigureOut">
               <a:rPr lang="ko-KR" altLang="en-US" smtClean="0"/>
-              <a:t>2026-04-22</a:t>
+              <a:t>2026-04-23</a:t>
             </a:fld>
             <a:endParaRPr lang="ko-KR" altLang="en-US"/>
           </a:p>
@@ -1736,7 +1741,7 @@
           <a:p>
             <a:fld id="{0B88EAB9-2298-483C-BF85-65AE06BD6D9F}" type="datetimeFigureOut">
               <a:rPr lang="ko-KR" altLang="en-US" smtClean="0"/>
-              <a:t>2026-04-22</a:t>
+              <a:t>2026-04-23</a:t>
             </a:fld>
             <a:endParaRPr lang="ko-KR" altLang="en-US"/>
           </a:p>
@@ -1831,7 +1836,7 @@
           <a:p>
             <a:fld id="{0B88EAB9-2298-483C-BF85-65AE06BD6D9F}" type="datetimeFigureOut">
               <a:rPr lang="ko-KR" altLang="en-US" smtClean="0"/>
-              <a:t>2026-04-22</a:t>
+              <a:t>2026-04-23</a:t>
             </a:fld>
             <a:endParaRPr lang="ko-KR" altLang="en-US"/>
           </a:p>
@@ -2108,7 +2113,7 @@
           <a:p>
             <a:fld id="{0B88EAB9-2298-483C-BF85-65AE06BD6D9F}" type="datetimeFigureOut">
               <a:rPr lang="ko-KR" altLang="en-US" smtClean="0"/>
-              <a:t>2026-04-22</a:t>
+              <a:t>2026-04-23</a:t>
             </a:fld>
             <a:endParaRPr lang="ko-KR" altLang="en-US"/>
           </a:p>
@@ -2361,7 +2366,7 @@
           <a:p>
             <a:fld id="{0B88EAB9-2298-483C-BF85-65AE06BD6D9F}" type="datetimeFigureOut">
               <a:rPr lang="ko-KR" altLang="en-US" smtClean="0"/>
-              <a:t>2026-04-22</a:t>
+              <a:t>2026-04-23</a:t>
             </a:fld>
             <a:endParaRPr lang="ko-KR" altLang="en-US"/>
           </a:p>
@@ -2574,7 +2579,7 @@
           <a:p>
             <a:fld id="{0B88EAB9-2298-483C-BF85-65AE06BD6D9F}" type="datetimeFigureOut">
               <a:rPr lang="ko-KR" altLang="en-US" smtClean="0"/>
-              <a:t>2026-04-22</a:t>
+              <a:t>2026-04-23</a:t>
             </a:fld>
             <a:endParaRPr lang="ko-KR" altLang="en-US"/>
           </a:p>
@@ -9817,15 +9822,7 @@
                   <a:schemeClr val="tx1"/>
                 </a:solidFill>
               </a:rPr>
-              <a:t>변이 후 바로 진</a:t>
-            </a:r>
-            <a:r>
-              <a:rPr lang="ko-KR" altLang="en-US" smtClean="0">
-                <a:solidFill>
-                  <a:schemeClr val="tx1"/>
-                </a:solidFill>
-              </a:rPr>
-              <a:t>행</a:t>
+              <a:t>변이 후 바로 진행</a:t>
             </a:r>
             <a:endParaRPr lang="ko-KR" altLang="en-US">
               <a:solidFill>
